--- a/apps/resources/bundled_files/3-klass-olchomdor-sabak.pptx
+++ b/apps/resources/bundled_files/3-klass-olchomdor-sabak.pptx
@@ -5196,7 +5196,7 @@
                 </a:solidFill>
                 <a:latin typeface="PT Sans"/>
               </a:rPr>
-              <a:t>3-класс · Математика</a:t>
+              <a:t/>
             </a:r>
           </a:p>
         </p:txBody>
@@ -5688,7 +5688,7 @@
                 </a:solidFill>
                 <a:latin typeface="PT Sans"/>
               </a:rPr>
-              <a:t>3-класс ›</a:t>
+              <a:t/>
             </a:r>
           </a:p>
           <a:p>
@@ -6621,7 +6621,7 @@
                 </a:solidFill>
                 <a:latin typeface="PT Sans"/>
               </a:rPr>
-              <a:t>3-класс ›</a:t>
+              <a:t/>
             </a:r>
           </a:p>
           <a:p>
@@ -10375,7 +10375,7 @@
                 </a:solidFill>
                 <a:latin typeface="PT Sans"/>
               </a:rPr>
-              <a:t>3-класс ›</a:t>
+              <a:t/>
             </a:r>
           </a:p>
           <a:p>
@@ -18060,7 +18060,7 @@
                 </a:solidFill>
                 <a:latin typeface="PT Sans"/>
               </a:rPr>
-              <a:t>3-класс ›</a:t>
+              <a:t/>
             </a:r>
           </a:p>
           <a:p>
@@ -19643,7 +19643,7 @@
                 </a:solidFill>
                 <a:latin typeface="PT Sans"/>
               </a:rPr>
-              <a:t>3-класс ›</a:t>
+              <a:t/>
             </a:r>
           </a:p>
           <a:p>
@@ -20355,7 +20355,7 @@
                 </a:solidFill>
                 <a:latin typeface="PT Sans"/>
               </a:rPr>
-              <a:t>3-класс ›</a:t>
+              <a:t/>
             </a:r>
           </a:p>
           <a:p>
@@ -21028,7 +21028,7 @@
                 </a:solidFill>
                 <a:latin typeface="PT Sans"/>
               </a:rPr>
-              <a:t>3-класс ›</a:t>
+              <a:t/>
             </a:r>
           </a:p>
           <a:p>
@@ -22577,7 +22577,7 @@
                 </a:solidFill>
                 <a:latin typeface="PT Sans"/>
               </a:rPr>
-              <a:t>3-класс ›</a:t>
+              <a:t/>
             </a:r>
           </a:p>
           <a:p>
@@ -23661,7 +23661,7 @@
                 </a:solidFill>
                 <a:latin typeface="PT Sans"/>
               </a:rPr>
-              <a:t>3-класс ›</a:t>
+              <a:t/>
             </a:r>
           </a:p>
           <a:p>
@@ -25191,7 +25191,7 @@
                 </a:solidFill>
                 <a:latin typeface="PT Sans"/>
               </a:rPr>
-              <a:t>3-класс ›</a:t>
+              <a:t/>
             </a:r>
           </a:p>
           <a:p>
@@ -26784,7 +26784,7 @@
                 </a:solidFill>
                 <a:latin typeface="PT Sans"/>
               </a:rPr>
-              <a:t>3-класс ›</a:t>
+              <a:t/>
             </a:r>
           </a:p>
           <a:p>
@@ -28061,7 +28061,7 @@
                 </a:solidFill>
                 <a:latin typeface="PT Sans"/>
               </a:rPr>
-              <a:t>3-класс ›</a:t>
+              <a:t/>
             </a:r>
           </a:p>
           <a:p>
@@ -29489,7 +29489,7 @@
                 </a:solidFill>
                 <a:latin typeface="PT Sans"/>
               </a:rPr>
-              <a:t>3-класс ›</a:t>
+              <a:t/>
             </a:r>
           </a:p>
           <a:p>
@@ -30945,7 +30945,7 @@
                 </a:solidFill>
                 <a:latin typeface="PT Sans"/>
               </a:rPr>
-              <a:t>3-класс ›</a:t>
+              <a:t/>
             </a:r>
           </a:p>
           <a:p>
@@ -32031,7 +32031,7 @@
                 </a:solidFill>
                 <a:latin typeface="PT Sans"/>
               </a:rPr>
-              <a:t>3-класс ›</a:t>
+              <a:t/>
             </a:r>
           </a:p>
           <a:p>
@@ -32831,7 +32831,7 @@
                 </a:solidFill>
                 <a:latin typeface="PT Sans"/>
               </a:rPr>
-              <a:t>3-класс ›</a:t>
+              <a:t/>
             </a:r>
           </a:p>
           <a:p>
@@ -33672,7 +33672,7 @@
                 </a:solidFill>
                 <a:latin typeface="PT Sans"/>
               </a:rPr>
-              <a:t>3-класс ›</a:t>
+              <a:t/>
             </a:r>
           </a:p>
           <a:p>
@@ -34621,7 +34621,7 @@
                 </a:solidFill>
                 <a:latin typeface="PT Sans"/>
               </a:rPr>
-              <a:t>3-класс ›</a:t>
+              <a:t/>
             </a:r>
           </a:p>
           <a:p>
@@ -36075,7 +36075,7 @@
                 </a:solidFill>
                 <a:latin typeface="PT Sans"/>
               </a:rPr>
-              <a:t>3-класс ›</a:t>
+              <a:t/>
             </a:r>
           </a:p>
           <a:p>
@@ -36821,7 +36821,7 @@
                 </a:solidFill>
                 <a:latin typeface="PT Sans"/>
               </a:rPr>
-              <a:t>3-класс ›</a:t>
+              <a:t/>
             </a:r>
           </a:p>
           <a:p>
@@ -37629,7 +37629,7 @@
                 </a:solidFill>
                 <a:latin typeface="PT Sans"/>
               </a:rPr>
-              <a:t>3-класс ›</a:t>
+              <a:t/>
             </a:r>
           </a:p>
           <a:p>
@@ -38820,7 +38820,7 @@
                 </a:solidFill>
                 <a:latin typeface="PT Sans"/>
               </a:rPr>
-              <a:t>3-класс ›</a:t>
+              <a:t/>
             </a:r>
           </a:p>
           <a:p>
@@ -39999,7 +39999,7 @@
                 </a:solidFill>
                 <a:latin typeface="PT Sans"/>
               </a:rPr>
-              <a:t>3-класс ›</a:t>
+              <a:t/>
             </a:r>
           </a:p>
           <a:p>
@@ -40180,7 +40180,7 @@
                 </a:solidFill>
                 <a:latin typeface="PT Sans"/>
               </a:rPr>
-              <a:t>2-класс</a:t>
+              <a:t/>
             </a:r>
           </a:p>
         </p:txBody>
@@ -40360,7 +40360,7 @@
                 </a:solidFill>
                 <a:latin typeface="PT Sans"/>
               </a:rPr>
-              <a:t>3-класс</a:t>
+              <a:t/>
             </a:r>
           </a:p>
         </p:txBody>
@@ -40596,7 +40596,7 @@
                 </a:solidFill>
                 <a:latin typeface="PT Sans"/>
               </a:rPr>
-              <a:t>4-класс</a:t>
+              <a:t/>
             </a:r>
           </a:p>
         </p:txBody>
@@ -40777,7 +40777,7 @@
                 </a:solidFill>
                 <a:latin typeface="PT Sans"/>
               </a:rPr>
-              <a:t>5-класс</a:t>
+              <a:t/>
             </a:r>
           </a:p>
         </p:txBody>
@@ -41197,7 +41197,7 @@
                 </a:solidFill>
                 <a:latin typeface="PT Sans"/>
               </a:rPr>
-              <a:t>3-класс ›</a:t>
+              <a:t/>
             </a:r>
           </a:p>
           <a:p>
@@ -42345,7 +42345,7 @@
                 </a:solidFill>
                 <a:latin typeface="PT Sans"/>
               </a:rPr>
-              <a:t>3-класс ›</a:t>
+              <a:t/>
             </a:r>
           </a:p>
           <a:p>

--- a/apps/resources/bundled_files/3-klass-olchomdor-sabak.pptx
+++ b/apps/resources/bundled_files/3-klass-olchomdor-sabak.pptx
@@ -1582,7 +1582,7 @@
           <a:lstStyle/>
           <a:p>
             <a:r>
-              <a:t>Ой жүгүртүү маданияты (Wenxi Lee, 2.6).</a:t>
+              <a:t>Ой жүгүртүү маданияты (Wenxi Lee, 2,6).</a:t>
             </a:r>
           </a:p>
         </p:txBody>
